--- a/docs/presentation.pptx
+++ b/docs/presentation.pptx
@@ -14521,7 +14521,7 @@
                 <a:ea typeface="Georgia" pitchFamily="34" charset="-122"/>
                 <a:cs typeface="Georgia" pitchFamily="34" charset="-120"/>
               </a:rPr>
-              <a:t>Интерфейс: готовая дизайн-система вместо «сгенерированной админки»</a:t>
+              <a:t>Интерфейс по DESIGN.md: до и после</a:t>
             </a:r>
             <a:endParaRPr lang="en-US" sz="3200" dirty="0"/>
           </a:p>
